--- a/docs/submission/CloudNote_AI_PRC-III_Review.pptx
+++ b/docs/submission/CloudNote_AI_PRC-III_Review.pptx
@@ -3867,7 +3867,7 @@
                 <a:ea typeface="Calibri" pitchFamily="34" charset="-122"/>
                 <a:cs typeface="Calibri" pitchFamily="34" charset="-120"/>
               </a:rPr>
-              <a:t>Team No - </a:t>
+              <a:t>Team No - 7</a:t>
             </a:r>
             <a:endParaRPr lang="en-US" sz="1600" dirty="0"/>
           </a:p>
